--- a/curso/pptx/S33.pptx
+++ b/curso/pptx/S33.pptx
@@ -4195,7 +4195,7 @@
                 </a:solidFill>
                 <a:latin typeface="Nunito Sans"/>
               </a:rPr>
-              <a:t>Un bulo triunfa si nos </a:t>
+              <a:t>如果一个谣言让我们</a:t>
             </a:r>
             <a:r>
               <a:rPr sz="2800" b="1">
@@ -4204,7 +4204,7 @@
                 </a:solidFill>
                 <a:latin typeface="Nunito Sans"/>
               </a:rPr>
-              <a:t>emociona</a:t>
+              <a:t>激动</a:t>
             </a:r>
             <a:r>
               <a:rPr sz="2800" b="0">
@@ -4213,7 +4213,7 @@
                 </a:solidFill>
                 <a:latin typeface="Nunito Sans"/>
               </a:rPr>
-              <a:t> o nos da la razón</a:t>
+              <a:t>，或者说我们是对的，它就能成功</a:t>
             </a:r>
           </a:p>
           <a:p>
@@ -4238,7 +4238,7 @@
                 </a:solidFill>
                 <a:latin typeface="Nunito Sans"/>
               </a:rPr>
-              <a:t>Que un mensaje nos guste no lo hace verdadero</a:t>
+              <a:t>一条消息让我们喜欢，不会让它变成真的</a:t>
             </a:r>
           </a:p>
           <a:p>
@@ -4263,7 +4263,7 @@
                 </a:solidFill>
                 <a:latin typeface="Nunito Sans"/>
               </a:rPr>
-              <a:t>Para pensar: si comparto un bulo sin saberlo, ¿tengo alguna responsabilidad?</a:t>
+              <a:t>想一想：如果我在不知情的情况下转发了谣言，我有没有一点责任？</a:t>
             </a:r>
           </a:p>
         </p:txBody>
@@ -7336,7 +7336,7 @@
                 </a:solidFill>
                 <a:latin typeface="Nunito Sans"/>
               </a:rPr>
-              <a:t>No es un error: alguien lo </a:t>
+              <a:t>这不是错误：是有人故意</a:t>
             </a:r>
             <a:r>
               <a:rPr sz="2800" b="1">
@@ -7345,7 +7345,7 @@
                 </a:solidFill>
                 <a:latin typeface="Nunito Sans"/>
               </a:rPr>
-              <a:t>inventa</a:t>
+              <a:t>编造</a:t>
             </a:r>
             <a:r>
               <a:rPr sz="2800" b="0">
@@ -7354,7 +7354,7 @@
                 </a:solidFill>
                 <a:latin typeface="Nunito Sans"/>
               </a:rPr>
-              <a:t> a propósito</a:t>
+              <a:t>的</a:t>
             </a:r>
           </a:p>
           <a:p>
@@ -7379,7 +7379,7 @@
                 </a:solidFill>
                 <a:latin typeface="Nunito Sans"/>
               </a:rPr>
-              <a:t>Busca dinero, fama, hacer daño o reírse de otros</a:t>
+              <a:t>目的是钱、名气、伤害别人或者取笑别人</a:t>
             </a:r>
           </a:p>
           <a:p>
@@ -7404,7 +7404,7 @@
                 </a:solidFill>
                 <a:latin typeface="Nunito Sans"/>
               </a:rPr>
-              <a:t>Se extiende por WhatsApp, TikTok y otras redes</a:t>
+              <a:t>通过微信、抖音和别的社交网络传播</a:t>
             </a:r>
           </a:p>
         </p:txBody>
@@ -7556,7 +7556,7 @@
                 </a:solidFill>
                 <a:latin typeface="Nunito Sans"/>
               </a:rPr>
-              <a:t>Urgencia:</a:t>
+              <a:t>紧迫感：</a:t>
             </a:r>
             <a:r>
               <a:rPr sz="2800" b="0">
@@ -7565,7 +7565,7 @@
                 </a:solidFill>
                 <a:latin typeface="Nunito Sans"/>
               </a:rPr>
-              <a:t> «¡Última hora!», «¡Compártelo ya!»</a:t>
+              <a:t>“最新消息！”“马上转发！”</a:t>
             </a:r>
           </a:p>
           <a:p>
@@ -7590,7 +7590,7 @@
                 </a:solidFill>
                 <a:latin typeface="Nunito Sans"/>
               </a:rPr>
-              <a:t>Emoción fuerte:</a:t>
+              <a:t>强烈的情绪：</a:t>
             </a:r>
             <a:r>
               <a:rPr sz="2800" b="0">
@@ -7599,7 +7599,7 @@
                 </a:solidFill>
                 <a:latin typeface="Nunito Sans"/>
               </a:rPr>
-              <a:t> miedo, enfado o pena</a:t>
+              <a:t>害怕、愤怒或者难过</a:t>
             </a:r>
           </a:p>
           <a:p>
@@ -7624,7 +7624,7 @@
                 </a:solidFill>
                 <a:latin typeface="Nunito Sans"/>
               </a:rPr>
-              <a:t>Fuente vaga:</a:t>
+              <a:t>含糊的来源：</a:t>
             </a:r>
             <a:r>
               <a:rPr sz="2800" b="0">
@@ -7633,7 +7633,7 @@
                 </a:solidFill>
                 <a:latin typeface="Nunito Sans"/>
               </a:rPr>
-              <a:t> «un amigo policía», «lo dice un médico»</a:t>
+              <a:t>“我一个当警察的朋友”“一位医生说的”</a:t>
             </a:r>
           </a:p>
           <a:p>
@@ -7658,7 +7658,7 @@
                 </a:solidFill>
                 <a:latin typeface="Nunito Sans"/>
               </a:rPr>
-              <a:t>Sin fecha ni lugar exacto</a:t>
+              <a:t>没有确切的日期和地点</a:t>
             </a:r>
           </a:p>
           <a:p>
@@ -7683,7 +7683,7 @@
                 </a:solidFill>
                 <a:latin typeface="Nunito Sans"/>
               </a:rPr>
-              <a:t>Imagen llamativa</a:t>
+              <a:t>吸引人的图片</a:t>
             </a:r>
             <a:r>
               <a:rPr sz="2800" b="0">
@@ -7692,7 +7692,7 @@
                 </a:solidFill>
                 <a:latin typeface="Nunito Sans"/>
               </a:rPr>
-              <a:t>, a veces de otro sitio o de otro momento</a:t>
+              <a:t>，有时来自别的地方或别的时间</a:t>
             </a:r>
           </a:p>
         </p:txBody>
@@ -7987,7 +7987,7 @@
                 </a:solidFill>
                 <a:latin typeface="Nunito Sans"/>
               </a:rPr>
-              <a:t>Nos </a:t>
+              <a:t>它们让我们</a:t>
             </a:r>
             <a:r>
               <a:rPr sz="2800" b="1">
@@ -7996,7 +7996,7 @@
                 </a:solidFill>
                 <a:latin typeface="Nunito Sans"/>
               </a:rPr>
-              <a:t>emocionan</a:t>
+              <a:t>激动</a:t>
             </a:r>
             <a:r>
               <a:rPr sz="2800" b="0">
@@ -8005,7 +8005,7 @@
                 </a:solidFill>
                 <a:latin typeface="Nunito Sans"/>
               </a:rPr>
-              <a:t> y queremos avisar a los demás</a:t>
+              <a:t>，我们想提醒别人</a:t>
             </a:r>
           </a:p>
           <a:p>
@@ -8030,7 +8030,7 @@
                 </a:solidFill>
                 <a:latin typeface="Nunito Sans"/>
               </a:rPr>
-              <a:t>Lo manda alguien de </a:t>
+              <a:t>是一个</a:t>
             </a:r>
             <a:r>
               <a:rPr sz="2800" b="1">
@@ -8039,7 +8039,16 @@
                 </a:solidFill>
                 <a:latin typeface="Nunito Sans"/>
               </a:rPr>
-              <a:t>confianza</a:t>
+              <a:t>值得信任</a:t>
+            </a:r>
+            <a:r>
+              <a:rPr sz="2800" b="0">
+                <a:solidFill>
+                  <a:srgbClr val="1F2A44"/>
+                </a:solidFill>
+                <a:latin typeface="Nunito Sans"/>
+              </a:rPr>
+              <a:t>的人发来的</a:t>
             </a:r>
           </a:p>
           <a:p>
@@ -8064,7 +8073,7 @@
                 </a:solidFill>
                 <a:latin typeface="Nunito Sans"/>
               </a:rPr>
-              <a:t>Encaja con lo que </a:t>
+              <a:t>它符合我们</a:t>
             </a:r>
             <a:r>
               <a:rPr sz="2800" b="1">
@@ -8073,7 +8082,7 @@
                 </a:solidFill>
                 <a:latin typeface="Nunito Sans"/>
               </a:rPr>
-              <a:t>ya pensábamos</a:t>
+              <a:t>原来就想的</a:t>
             </a:r>
           </a:p>
           <a:p>
@@ -8098,7 +8107,7 @@
                 </a:solidFill>
                 <a:latin typeface="Nunito Sans"/>
               </a:rPr>
-              <a:t>Compartir es </a:t>
+              <a:t>转发</a:t>
             </a:r>
             <a:r>
               <a:rPr sz="2800" b="1">
@@ -8107,7 +8116,7 @@
                 </a:solidFill>
                 <a:latin typeface="Nunito Sans"/>
               </a:rPr>
-              <a:t>muy fácil</a:t>
+              <a:t>非常容易</a:t>
             </a:r>
             <a:r>
               <a:rPr sz="2800" b="0">
@@ -8116,7 +8125,7 @@
                 </a:solidFill>
                 <a:latin typeface="Nunito Sans"/>
               </a:rPr>
-              <a:t>: un solo clic</a:t>
+              <a:t>：只要点一下</a:t>
             </a:r>
           </a:p>
           <a:p>
@@ -8141,7 +8150,7 @@
                 </a:solidFill>
                 <a:latin typeface="Nunito Sans"/>
               </a:rPr>
-              <a:t>En Twitter, las noticias falsas se compartían más y más rápido (MIT, 2018)</a:t>
+              <a:t>在推特上，假新闻被转发得更多、更快（MIT，2018年）</a:t>
             </a:r>
           </a:p>
         </p:txBody>
